--- a/Slides/Ch2.2-2.3-Roscoe26.pptx
+++ b/Slides/Ch2.2-2.3-Roscoe26.pptx
@@ -650,6 +650,426 @@
 </p:notes>
 </file>
 
+<file path=ppt/notesSlides/notesSlide10.xml><?xml version="1.0" encoding="utf-8"?>
+<p:notes xmlns:a="http://schemas.openxmlformats.org/drawingml/2006/main" xmlns:r="http://schemas.openxmlformats.org/officeDocument/2006/relationships" xmlns:p="http://schemas.openxmlformats.org/presentationml/2006/main">
+  <p:cSld>
+    <p:spTree>
+      <p:nvGrpSpPr>
+        <p:cNvPr id="1" name=""/>
+        <p:cNvGrpSpPr/>
+        <p:nvPr/>
+      </p:nvGrpSpPr>
+      <p:grpSpPr>
+        <a:xfrm>
+          <a:off x="0" y="0"/>
+          <a:ext cx="0" cy="0"/>
+          <a:chOff x="0" y="0"/>
+          <a:chExt cx="0" cy="0"/>
+        </a:xfrm>
+      </p:grpSpPr>
+      <p:sp>
+        <p:nvSpPr>
+          <p:cNvPr id="2" name="Slide Image Placeholder 1"/>
+          <p:cNvSpPr>
+            <a:spLocks noGrp="1" noRot="1" noChangeAspect="1"/>
+          </p:cNvSpPr>
+          <p:nvPr>
+            <p:ph type="sldImg"/>
+          </p:nvPr>
+        </p:nvSpPr>
+        <p:spPr/>
+      </p:sp>
+      <p:sp>
+        <p:nvSpPr>
+          <p:cNvPr id="3" name="Notes Placeholder 2"/>
+          <p:cNvSpPr>
+            <a:spLocks noGrp="1"/>
+          </p:cNvSpPr>
+          <p:nvPr>
+            <p:ph type="body" idx="1"/>
+          </p:nvPr>
+        </p:nvSpPr>
+        <p:spPr/>
+        <p:txBody>
+          <a:bodyPr/>
+          <a:lstStyle/>
+          <a:p>
+            <a:endParaRPr lang="en-US" dirty="0"/>
+          </a:p>
+        </p:txBody>
+      </p:sp>
+      <p:sp>
+        <p:nvSpPr>
+          <p:cNvPr id="4" name="Slide Number Placeholder 3"/>
+          <p:cNvSpPr>
+            <a:spLocks noGrp="1"/>
+          </p:cNvSpPr>
+          <p:nvPr>
+            <p:ph type="sldNum" sz="quarter" idx="5"/>
+          </p:nvPr>
+        </p:nvSpPr>
+        <p:spPr/>
+        <p:txBody>
+          <a:bodyPr/>
+          <a:lstStyle/>
+          <a:p>
+            <a:fld id="{EDFF388A-3BC8-A142-AF66-8F5EA441DA44}" type="slidenum">
+              <a:rPr lang="en-US" smtClean="0"/>
+              <a:t>28</a:t>
+            </a:fld>
+            <a:endParaRPr lang="en-US"/>
+          </a:p>
+        </p:txBody>
+      </p:sp>
+    </p:spTree>
+    <p:extLst>
+      <p:ext uri="{BB962C8B-B14F-4D97-AF65-F5344CB8AC3E}">
+        <p14:creationId xmlns:p14="http://schemas.microsoft.com/office/powerpoint/2010/main" val="2256416782"/>
+      </p:ext>
+    </p:extLst>
+  </p:cSld>
+  <p:clrMapOvr>
+    <a:masterClrMapping/>
+  </p:clrMapOvr>
+</p:notes>
+</file>
+
+<file path=ppt/notesSlides/notesSlide11.xml><?xml version="1.0" encoding="utf-8"?>
+<p:notes xmlns:a="http://schemas.openxmlformats.org/drawingml/2006/main" xmlns:r="http://schemas.openxmlformats.org/officeDocument/2006/relationships" xmlns:p="http://schemas.openxmlformats.org/presentationml/2006/main">
+  <p:cSld>
+    <p:spTree>
+      <p:nvGrpSpPr>
+        <p:cNvPr id="1" name=""/>
+        <p:cNvGrpSpPr/>
+        <p:nvPr/>
+      </p:nvGrpSpPr>
+      <p:grpSpPr>
+        <a:xfrm>
+          <a:off x="0" y="0"/>
+          <a:ext cx="0" cy="0"/>
+          <a:chOff x="0" y="0"/>
+          <a:chExt cx="0" cy="0"/>
+        </a:xfrm>
+      </p:grpSpPr>
+      <p:sp>
+        <p:nvSpPr>
+          <p:cNvPr id="2" name="Slide Image Placeholder 1"/>
+          <p:cNvSpPr>
+            <a:spLocks noGrp="1" noRot="1" noChangeAspect="1"/>
+          </p:cNvSpPr>
+          <p:nvPr>
+            <p:ph type="sldImg"/>
+          </p:nvPr>
+        </p:nvSpPr>
+        <p:spPr/>
+      </p:sp>
+      <p:sp>
+        <p:nvSpPr>
+          <p:cNvPr id="3" name="Notes Placeholder 2"/>
+          <p:cNvSpPr>
+            <a:spLocks noGrp="1"/>
+          </p:cNvSpPr>
+          <p:nvPr>
+            <p:ph type="body" idx="1"/>
+          </p:nvPr>
+        </p:nvSpPr>
+        <p:spPr/>
+        <p:txBody>
+          <a:bodyPr/>
+          <a:lstStyle/>
+          <a:p>
+            <a:endParaRPr lang="en-US" dirty="0"/>
+          </a:p>
+        </p:txBody>
+      </p:sp>
+      <p:sp>
+        <p:nvSpPr>
+          <p:cNvPr id="4" name="Slide Number Placeholder 3"/>
+          <p:cNvSpPr>
+            <a:spLocks noGrp="1"/>
+          </p:cNvSpPr>
+          <p:nvPr>
+            <p:ph type="sldNum" sz="quarter" idx="5"/>
+          </p:nvPr>
+        </p:nvSpPr>
+        <p:spPr/>
+        <p:txBody>
+          <a:bodyPr/>
+          <a:lstStyle/>
+          <a:p>
+            <a:fld id="{EDFF388A-3BC8-A142-AF66-8F5EA441DA44}" type="slidenum">
+              <a:rPr lang="en-US" smtClean="0"/>
+              <a:t>29</a:t>
+            </a:fld>
+            <a:endParaRPr lang="en-US"/>
+          </a:p>
+        </p:txBody>
+      </p:sp>
+    </p:spTree>
+    <p:extLst>
+      <p:ext uri="{BB962C8B-B14F-4D97-AF65-F5344CB8AC3E}">
+        <p14:creationId xmlns:p14="http://schemas.microsoft.com/office/powerpoint/2010/main" val="3539928983"/>
+      </p:ext>
+    </p:extLst>
+  </p:cSld>
+  <p:clrMapOvr>
+    <a:masterClrMapping/>
+  </p:clrMapOvr>
+</p:notes>
+</file>
+
+<file path=ppt/notesSlides/notesSlide12.xml><?xml version="1.0" encoding="utf-8"?>
+<p:notes xmlns:a="http://schemas.openxmlformats.org/drawingml/2006/main" xmlns:r="http://schemas.openxmlformats.org/officeDocument/2006/relationships" xmlns:p="http://schemas.openxmlformats.org/presentationml/2006/main">
+  <p:cSld>
+    <p:spTree>
+      <p:nvGrpSpPr>
+        <p:cNvPr id="1" name=""/>
+        <p:cNvGrpSpPr/>
+        <p:nvPr/>
+      </p:nvGrpSpPr>
+      <p:grpSpPr>
+        <a:xfrm>
+          <a:off x="0" y="0"/>
+          <a:ext cx="0" cy="0"/>
+          <a:chOff x="0" y="0"/>
+          <a:chExt cx="0" cy="0"/>
+        </a:xfrm>
+      </p:grpSpPr>
+      <p:sp>
+        <p:nvSpPr>
+          <p:cNvPr id="2" name="Slide Image Placeholder 1"/>
+          <p:cNvSpPr>
+            <a:spLocks noGrp="1" noRot="1" noChangeAspect="1"/>
+          </p:cNvSpPr>
+          <p:nvPr>
+            <p:ph type="sldImg"/>
+          </p:nvPr>
+        </p:nvSpPr>
+        <p:spPr/>
+      </p:sp>
+      <p:sp>
+        <p:nvSpPr>
+          <p:cNvPr id="3" name="Notes Placeholder 2"/>
+          <p:cNvSpPr>
+            <a:spLocks noGrp="1"/>
+          </p:cNvSpPr>
+          <p:nvPr>
+            <p:ph type="body" idx="1"/>
+          </p:nvPr>
+        </p:nvSpPr>
+        <p:spPr/>
+        <p:txBody>
+          <a:bodyPr/>
+          <a:lstStyle/>
+          <a:p>
+            <a:endParaRPr lang="en-US" dirty="0"/>
+          </a:p>
+        </p:txBody>
+      </p:sp>
+      <p:sp>
+        <p:nvSpPr>
+          <p:cNvPr id="4" name="Slide Number Placeholder 3"/>
+          <p:cNvSpPr>
+            <a:spLocks noGrp="1"/>
+          </p:cNvSpPr>
+          <p:nvPr>
+            <p:ph type="sldNum" sz="quarter" idx="5"/>
+          </p:nvPr>
+        </p:nvSpPr>
+        <p:spPr/>
+        <p:txBody>
+          <a:bodyPr/>
+          <a:lstStyle/>
+          <a:p>
+            <a:fld id="{EDFF388A-3BC8-A142-AF66-8F5EA441DA44}" type="slidenum">
+              <a:rPr lang="en-US" smtClean="0"/>
+              <a:t>30</a:t>
+            </a:fld>
+            <a:endParaRPr lang="en-US"/>
+          </a:p>
+        </p:txBody>
+      </p:sp>
+    </p:spTree>
+    <p:extLst>
+      <p:ext uri="{BB962C8B-B14F-4D97-AF65-F5344CB8AC3E}">
+        <p14:creationId xmlns:p14="http://schemas.microsoft.com/office/powerpoint/2010/main" val="1817203016"/>
+      </p:ext>
+    </p:extLst>
+  </p:cSld>
+  <p:clrMapOvr>
+    <a:masterClrMapping/>
+  </p:clrMapOvr>
+</p:notes>
+</file>
+
+<file path=ppt/notesSlides/notesSlide13.xml><?xml version="1.0" encoding="utf-8"?>
+<p:notes xmlns:a="http://schemas.openxmlformats.org/drawingml/2006/main" xmlns:r="http://schemas.openxmlformats.org/officeDocument/2006/relationships" xmlns:p="http://schemas.openxmlformats.org/presentationml/2006/main">
+  <p:cSld>
+    <p:spTree>
+      <p:nvGrpSpPr>
+        <p:cNvPr id="1" name=""/>
+        <p:cNvGrpSpPr/>
+        <p:nvPr/>
+      </p:nvGrpSpPr>
+      <p:grpSpPr>
+        <a:xfrm>
+          <a:off x="0" y="0"/>
+          <a:ext cx="0" cy="0"/>
+          <a:chOff x="0" y="0"/>
+          <a:chExt cx="0" cy="0"/>
+        </a:xfrm>
+      </p:grpSpPr>
+      <p:sp>
+        <p:nvSpPr>
+          <p:cNvPr id="2" name="Slide Image Placeholder 1"/>
+          <p:cNvSpPr>
+            <a:spLocks noGrp="1" noRot="1" noChangeAspect="1"/>
+          </p:cNvSpPr>
+          <p:nvPr>
+            <p:ph type="sldImg"/>
+          </p:nvPr>
+        </p:nvSpPr>
+        <p:spPr/>
+      </p:sp>
+      <p:sp>
+        <p:nvSpPr>
+          <p:cNvPr id="3" name="Notes Placeholder 2"/>
+          <p:cNvSpPr>
+            <a:spLocks noGrp="1"/>
+          </p:cNvSpPr>
+          <p:nvPr>
+            <p:ph type="body" idx="1"/>
+          </p:nvPr>
+        </p:nvSpPr>
+        <p:spPr/>
+        <p:txBody>
+          <a:bodyPr/>
+          <a:lstStyle/>
+          <a:p>
+            <a:endParaRPr lang="en-US" dirty="0"/>
+          </a:p>
+        </p:txBody>
+      </p:sp>
+      <p:sp>
+        <p:nvSpPr>
+          <p:cNvPr id="4" name="Slide Number Placeholder 3"/>
+          <p:cNvSpPr>
+            <a:spLocks noGrp="1"/>
+          </p:cNvSpPr>
+          <p:nvPr>
+            <p:ph type="sldNum" sz="quarter" idx="5"/>
+          </p:nvPr>
+        </p:nvSpPr>
+        <p:spPr/>
+        <p:txBody>
+          <a:bodyPr/>
+          <a:lstStyle/>
+          <a:p>
+            <a:fld id="{EDFF388A-3BC8-A142-AF66-8F5EA441DA44}" type="slidenum">
+              <a:rPr lang="en-US" smtClean="0"/>
+              <a:t>41</a:t>
+            </a:fld>
+            <a:endParaRPr lang="en-US"/>
+          </a:p>
+        </p:txBody>
+      </p:sp>
+    </p:spTree>
+    <p:extLst>
+      <p:ext uri="{BB962C8B-B14F-4D97-AF65-F5344CB8AC3E}">
+        <p14:creationId xmlns:p14="http://schemas.microsoft.com/office/powerpoint/2010/main" val="1264000337"/>
+      </p:ext>
+    </p:extLst>
+  </p:cSld>
+  <p:clrMapOvr>
+    <a:masterClrMapping/>
+  </p:clrMapOvr>
+</p:notes>
+</file>
+
+<file path=ppt/notesSlides/notesSlide14.xml><?xml version="1.0" encoding="utf-8"?>
+<p:notes xmlns:a="http://schemas.openxmlformats.org/drawingml/2006/main" xmlns:r="http://schemas.openxmlformats.org/officeDocument/2006/relationships" xmlns:p="http://schemas.openxmlformats.org/presentationml/2006/main">
+  <p:cSld>
+    <p:spTree>
+      <p:nvGrpSpPr>
+        <p:cNvPr id="1" name=""/>
+        <p:cNvGrpSpPr/>
+        <p:nvPr/>
+      </p:nvGrpSpPr>
+      <p:grpSpPr>
+        <a:xfrm>
+          <a:off x="0" y="0"/>
+          <a:ext cx="0" cy="0"/>
+          <a:chOff x="0" y="0"/>
+          <a:chExt cx="0" cy="0"/>
+        </a:xfrm>
+      </p:grpSpPr>
+      <p:sp>
+        <p:nvSpPr>
+          <p:cNvPr id="2" name="Slide Image Placeholder 1"/>
+          <p:cNvSpPr>
+            <a:spLocks noGrp="1" noRot="1" noChangeAspect="1"/>
+          </p:cNvSpPr>
+          <p:nvPr>
+            <p:ph type="sldImg"/>
+          </p:nvPr>
+        </p:nvSpPr>
+        <p:spPr/>
+      </p:sp>
+      <p:sp>
+        <p:nvSpPr>
+          <p:cNvPr id="3" name="Notes Placeholder 2"/>
+          <p:cNvSpPr>
+            <a:spLocks noGrp="1"/>
+          </p:cNvSpPr>
+          <p:nvPr>
+            <p:ph type="body" idx="1"/>
+          </p:nvPr>
+        </p:nvSpPr>
+        <p:spPr/>
+        <p:txBody>
+          <a:bodyPr/>
+          <a:lstStyle/>
+          <a:p>
+            <a:endParaRPr lang="en-US" dirty="0"/>
+          </a:p>
+        </p:txBody>
+      </p:sp>
+      <p:sp>
+        <p:nvSpPr>
+          <p:cNvPr id="4" name="Slide Number Placeholder 3"/>
+          <p:cNvSpPr>
+            <a:spLocks noGrp="1"/>
+          </p:cNvSpPr>
+          <p:nvPr>
+            <p:ph type="sldNum" sz="quarter" idx="5"/>
+          </p:nvPr>
+        </p:nvSpPr>
+        <p:spPr/>
+        <p:txBody>
+          <a:bodyPr/>
+          <a:lstStyle/>
+          <a:p>
+            <a:fld id="{EDFF388A-3BC8-A142-AF66-8F5EA441DA44}" type="slidenum">
+              <a:rPr lang="en-US" smtClean="0"/>
+              <a:t>47</a:t>
+            </a:fld>
+            <a:endParaRPr lang="en-US"/>
+          </a:p>
+        </p:txBody>
+      </p:sp>
+    </p:spTree>
+    <p:extLst>
+      <p:ext uri="{BB962C8B-B14F-4D97-AF65-F5344CB8AC3E}">
+        <p14:creationId xmlns:p14="http://schemas.microsoft.com/office/powerpoint/2010/main" val="2087929039"/>
+      </p:ext>
+    </p:extLst>
+  </p:cSld>
+  <p:clrMapOvr>
+    <a:masterClrMapping/>
+  </p:clrMapOvr>
+</p:notes>
+</file>
+
 <file path=ppt/notesSlides/notesSlide2.xml><?xml version="1.0" encoding="utf-8"?>
 <p:notes xmlns:a="http://schemas.openxmlformats.org/drawingml/2006/main" xmlns:r="http://schemas.openxmlformats.org/officeDocument/2006/relationships" xmlns:p="http://schemas.openxmlformats.org/presentationml/2006/main">
   <p:cSld>
@@ -715,6 +1135,90 @@
           <a:p>
             <a:fld id="{EDFF388A-3BC8-A142-AF66-8F5EA441DA44}" type="slidenum">
               <a:rPr lang="en-US" smtClean="0"/>
+              <a:t>2</a:t>
+            </a:fld>
+            <a:endParaRPr lang="en-US"/>
+          </a:p>
+        </p:txBody>
+      </p:sp>
+    </p:spTree>
+    <p:extLst>
+      <p:ext uri="{BB962C8B-B14F-4D97-AF65-F5344CB8AC3E}">
+        <p14:creationId xmlns:p14="http://schemas.microsoft.com/office/powerpoint/2010/main" val="2809484327"/>
+      </p:ext>
+    </p:extLst>
+  </p:cSld>
+  <p:clrMapOvr>
+    <a:masterClrMapping/>
+  </p:clrMapOvr>
+</p:notes>
+</file>
+
+<file path=ppt/notesSlides/notesSlide3.xml><?xml version="1.0" encoding="utf-8"?>
+<p:notes xmlns:a="http://schemas.openxmlformats.org/drawingml/2006/main" xmlns:r="http://schemas.openxmlformats.org/officeDocument/2006/relationships" xmlns:p="http://schemas.openxmlformats.org/presentationml/2006/main">
+  <p:cSld>
+    <p:spTree>
+      <p:nvGrpSpPr>
+        <p:cNvPr id="1" name=""/>
+        <p:cNvGrpSpPr/>
+        <p:nvPr/>
+      </p:nvGrpSpPr>
+      <p:grpSpPr>
+        <a:xfrm>
+          <a:off x="0" y="0"/>
+          <a:ext cx="0" cy="0"/>
+          <a:chOff x="0" y="0"/>
+          <a:chExt cx="0" cy="0"/>
+        </a:xfrm>
+      </p:grpSpPr>
+      <p:sp>
+        <p:nvSpPr>
+          <p:cNvPr id="2" name="Slide Image Placeholder 1"/>
+          <p:cNvSpPr>
+            <a:spLocks noGrp="1" noRot="1" noChangeAspect="1"/>
+          </p:cNvSpPr>
+          <p:nvPr>
+            <p:ph type="sldImg"/>
+          </p:nvPr>
+        </p:nvSpPr>
+        <p:spPr/>
+      </p:sp>
+      <p:sp>
+        <p:nvSpPr>
+          <p:cNvPr id="3" name="Notes Placeholder 2"/>
+          <p:cNvSpPr>
+            <a:spLocks noGrp="1"/>
+          </p:cNvSpPr>
+          <p:nvPr>
+            <p:ph type="body" idx="1"/>
+          </p:nvPr>
+        </p:nvSpPr>
+        <p:spPr/>
+        <p:txBody>
+          <a:bodyPr/>
+          <a:lstStyle/>
+          <a:p>
+            <a:endParaRPr lang="en-US" dirty="0"/>
+          </a:p>
+        </p:txBody>
+      </p:sp>
+      <p:sp>
+        <p:nvSpPr>
+          <p:cNvPr id="4" name="Slide Number Placeholder 3"/>
+          <p:cNvSpPr>
+            <a:spLocks noGrp="1"/>
+          </p:cNvSpPr>
+          <p:nvPr>
+            <p:ph type="sldNum" sz="quarter" idx="5"/>
+          </p:nvPr>
+        </p:nvSpPr>
+        <p:spPr/>
+        <p:txBody>
+          <a:bodyPr/>
+          <a:lstStyle/>
+          <a:p>
+            <a:fld id="{EDFF388A-3BC8-A142-AF66-8F5EA441DA44}" type="slidenum">
+              <a:rPr lang="en-US" smtClean="0"/>
               <a:t>3</a:t>
             </a:fld>
             <a:endParaRPr lang="en-US"/>
@@ -734,7 +1238,7 @@
 </p:notes>
 </file>
 
-<file path=ppt/notesSlides/notesSlide3.xml><?xml version="1.0" encoding="utf-8"?>
+<file path=ppt/notesSlides/notesSlide4.xml><?xml version="1.0" encoding="utf-8"?>
 <p:notes xmlns:a="http://schemas.openxmlformats.org/drawingml/2006/main" xmlns:r="http://schemas.openxmlformats.org/officeDocument/2006/relationships" xmlns:p="http://schemas.openxmlformats.org/presentationml/2006/main">
   <p:cSld>
     <p:spTree>
@@ -878,90 +1382,6 @@
 </p:notes>
 </file>
 
-<file path=ppt/notesSlides/notesSlide4.xml><?xml version="1.0" encoding="utf-8"?>
-<p:notes xmlns:a="http://schemas.openxmlformats.org/drawingml/2006/main" xmlns:r="http://schemas.openxmlformats.org/officeDocument/2006/relationships" xmlns:p="http://schemas.openxmlformats.org/presentationml/2006/main">
-  <p:cSld>
-    <p:spTree>
-      <p:nvGrpSpPr>
-        <p:cNvPr id="1" name=""/>
-        <p:cNvGrpSpPr/>
-        <p:nvPr/>
-      </p:nvGrpSpPr>
-      <p:grpSpPr>
-        <a:xfrm>
-          <a:off x="0" y="0"/>
-          <a:ext cx="0" cy="0"/>
-          <a:chOff x="0" y="0"/>
-          <a:chExt cx="0" cy="0"/>
-        </a:xfrm>
-      </p:grpSpPr>
-      <p:sp>
-        <p:nvSpPr>
-          <p:cNvPr id="2" name="Slide Image Placeholder 1"/>
-          <p:cNvSpPr>
-            <a:spLocks noGrp="1" noRot="1" noChangeAspect="1"/>
-          </p:cNvSpPr>
-          <p:nvPr>
-            <p:ph type="sldImg"/>
-          </p:nvPr>
-        </p:nvSpPr>
-        <p:spPr/>
-      </p:sp>
-      <p:sp>
-        <p:nvSpPr>
-          <p:cNvPr id="3" name="Notes Placeholder 2"/>
-          <p:cNvSpPr>
-            <a:spLocks noGrp="1"/>
-          </p:cNvSpPr>
-          <p:nvPr>
-            <p:ph type="body" idx="1"/>
-          </p:nvPr>
-        </p:nvSpPr>
-        <p:spPr/>
-        <p:txBody>
-          <a:bodyPr/>
-          <a:lstStyle/>
-          <a:p>
-            <a:endParaRPr lang="en-US" dirty="0"/>
-          </a:p>
-        </p:txBody>
-      </p:sp>
-      <p:sp>
-        <p:nvSpPr>
-          <p:cNvPr id="4" name="Slide Number Placeholder 3"/>
-          <p:cNvSpPr>
-            <a:spLocks noGrp="1"/>
-          </p:cNvSpPr>
-          <p:nvPr>
-            <p:ph type="sldNum" sz="quarter" idx="5"/>
-          </p:nvPr>
-        </p:nvSpPr>
-        <p:spPr/>
-        <p:txBody>
-          <a:bodyPr/>
-          <a:lstStyle/>
-          <a:p>
-            <a:fld id="{EDFF388A-3BC8-A142-AF66-8F5EA441DA44}" type="slidenum">
-              <a:rPr lang="en-US" smtClean="0"/>
-              <a:t>20</a:t>
-            </a:fld>
-            <a:endParaRPr lang="en-US"/>
-          </a:p>
-        </p:txBody>
-      </p:sp>
-    </p:spTree>
-    <p:extLst>
-      <p:ext uri="{BB962C8B-B14F-4D97-AF65-F5344CB8AC3E}">
-        <p14:creationId xmlns:p14="http://schemas.microsoft.com/office/powerpoint/2010/main" val="2439450539"/>
-      </p:ext>
-    </p:extLst>
-  </p:cSld>
-  <p:clrMapOvr>
-    <a:masterClrMapping/>
-  </p:clrMapOvr>
-</p:notes>
-</file>
-
 <file path=ppt/notesSlides/notesSlide5.xml><?xml version="1.0" encoding="utf-8"?>
 <p:notes xmlns:a="http://schemas.openxmlformats.org/drawingml/2006/main" xmlns:r="http://schemas.openxmlformats.org/officeDocument/2006/relationships" xmlns:p="http://schemas.openxmlformats.org/presentationml/2006/main">
   <p:cSld>
@@ -1027,7 +1447,7 @@
           <a:p>
             <a:fld id="{EDFF388A-3BC8-A142-AF66-8F5EA441DA44}" type="slidenum">
               <a:rPr lang="en-US" smtClean="0"/>
-              <a:t>25</a:t>
+              <a:t>16</a:t>
             </a:fld>
             <a:endParaRPr lang="en-US"/>
           </a:p>
@@ -1036,7 +1456,7 @@
     </p:spTree>
     <p:extLst>
       <p:ext uri="{BB962C8B-B14F-4D97-AF65-F5344CB8AC3E}">
-        <p14:creationId xmlns:p14="http://schemas.microsoft.com/office/powerpoint/2010/main" val="4281890223"/>
+        <p14:creationId xmlns:p14="http://schemas.microsoft.com/office/powerpoint/2010/main" val="4028893651"/>
       </p:ext>
     </p:extLst>
   </p:cSld>
@@ -1111,7 +1531,7 @@
           <a:p>
             <a:fld id="{EDFF388A-3BC8-A142-AF66-8F5EA441DA44}" type="slidenum">
               <a:rPr lang="en-US" smtClean="0"/>
-              <a:t>26</a:t>
+              <a:t>17</a:t>
             </a:fld>
             <a:endParaRPr lang="en-US"/>
           </a:p>
@@ -1120,7 +1540,7 @@
     </p:spTree>
     <p:extLst>
       <p:ext uri="{BB962C8B-B14F-4D97-AF65-F5344CB8AC3E}">
-        <p14:creationId xmlns:p14="http://schemas.microsoft.com/office/powerpoint/2010/main" val="3211040716"/>
+        <p14:creationId xmlns:p14="http://schemas.microsoft.com/office/powerpoint/2010/main" val="1543763485"/>
       </p:ext>
     </p:extLst>
   </p:cSld>
@@ -1195,7 +1615,7 @@
           <a:p>
             <a:fld id="{EDFF388A-3BC8-A142-AF66-8F5EA441DA44}" type="slidenum">
               <a:rPr lang="en-US" smtClean="0"/>
-              <a:t>28</a:t>
+              <a:t>20</a:t>
             </a:fld>
             <a:endParaRPr lang="en-US"/>
           </a:p>
@@ -1204,7 +1624,7 @@
     </p:spTree>
     <p:extLst>
       <p:ext uri="{BB962C8B-B14F-4D97-AF65-F5344CB8AC3E}">
-        <p14:creationId xmlns:p14="http://schemas.microsoft.com/office/powerpoint/2010/main" val="2256416782"/>
+        <p14:creationId xmlns:p14="http://schemas.microsoft.com/office/powerpoint/2010/main" val="2439450539"/>
       </p:ext>
     </p:extLst>
   </p:cSld>
@@ -1279,7 +1699,7 @@
           <a:p>
             <a:fld id="{EDFF388A-3BC8-A142-AF66-8F5EA441DA44}" type="slidenum">
               <a:rPr lang="en-US" smtClean="0"/>
-              <a:t>29</a:t>
+              <a:t>25</a:t>
             </a:fld>
             <a:endParaRPr lang="en-US"/>
           </a:p>
@@ -1288,7 +1708,7 @@
     </p:spTree>
     <p:extLst>
       <p:ext uri="{BB962C8B-B14F-4D97-AF65-F5344CB8AC3E}">
-        <p14:creationId xmlns:p14="http://schemas.microsoft.com/office/powerpoint/2010/main" val="3539928983"/>
+        <p14:creationId xmlns:p14="http://schemas.microsoft.com/office/powerpoint/2010/main" val="4281890223"/>
       </p:ext>
     </p:extLst>
   </p:cSld>
@@ -1363,7 +1783,7 @@
           <a:p>
             <a:fld id="{EDFF388A-3BC8-A142-AF66-8F5EA441DA44}" type="slidenum">
               <a:rPr lang="en-US" smtClean="0"/>
-              <a:t>47</a:t>
+              <a:t>26</a:t>
             </a:fld>
             <a:endParaRPr lang="en-US"/>
           </a:p>
@@ -1372,7 +1792,7 @@
     </p:spTree>
     <p:extLst>
       <p:ext uri="{BB962C8B-B14F-4D97-AF65-F5344CB8AC3E}">
-        <p14:creationId xmlns:p14="http://schemas.microsoft.com/office/powerpoint/2010/main" val="2087929039"/>
+        <p14:creationId xmlns:p14="http://schemas.microsoft.com/office/powerpoint/2010/main" val="3211040716"/>
       </p:ext>
     </p:extLst>
   </p:cSld>
@@ -13435,12 +13855,12 @@
           <a:graphicData uri="http://schemas.openxmlformats.org/presentationml/2006/ole">
             <mc:AlternateContent xmlns:mc="http://schemas.openxmlformats.org/markup-compatibility/2006">
               <mc:Choice xmlns:v="urn:schemas-microsoft-com:vml" Requires="v">
-                <p:oleObj name="Equation" r:id="rId2" imgW="1562100" imgH="774700" progId="Equation.DSMT4">
+                <p:oleObj name="Equation" r:id="rId3" imgW="1562100" imgH="774700" progId="Equation.DSMT4">
                   <p:embed/>
                 </p:oleObj>
               </mc:Choice>
               <mc:Fallback>
-                <p:oleObj name="Equation" r:id="rId2" imgW="1562100" imgH="774700" progId="Equation.DSMT4">
+                <p:oleObj name="Equation" r:id="rId3" imgW="1562100" imgH="774700" progId="Equation.DSMT4">
                   <p:embed/>
                   <p:pic>
                     <p:nvPicPr>
@@ -13451,7 +13871,7 @@
                       <p:nvPr/>
                     </p:nvPicPr>
                     <p:blipFill>
-                      <a:blip r:embed="rId3">
+                      <a:blip r:embed="rId4">
                         <a:extLst>
                           <a:ext uri="{28A0092B-C50C-407E-A947-70E740481C1C}">
                             <a14:useLocalDpi xmlns:a14="http://schemas.microsoft.com/office/drawing/2010/main" val="0"/>
@@ -13684,7 +14104,7 @@
           </p:nvPr>
         </p:nvPicPr>
         <p:blipFill rotWithShape="1">
-          <a:blip r:embed="rId2"/>
+          <a:blip r:embed="rId3"/>
           <a:stretch/>
         </p:blipFill>
         <p:spPr>
@@ -16597,7 +17017,7 @@
           </p:nvPr>
         </p:nvPicPr>
         <p:blipFill>
-          <a:blip r:embed="rId2">
+          <a:blip r:embed="rId3">
             <a:extLst>
               <a:ext uri="{28A0092B-C50C-407E-A947-70E740481C1C}">
                 <a14:useLocalDpi xmlns:a14="http://schemas.microsoft.com/office/drawing/2010/main" val="0"/>
@@ -19169,7 +19589,7 @@
           </p:nvPr>
         </p:nvPicPr>
         <p:blipFill rotWithShape="1">
-          <a:blip r:embed="rId2"/>
+          <a:blip r:embed="rId3"/>
           <a:srcRect b="5085"/>
           <a:stretch/>
         </p:blipFill>
